--- a/decks/hist-plantagenets/hist-plantagenets_ch1_before-1154.pptx
+++ b/decks/hist-plantagenets/hist-plantagenets_ch1_before-1154.pptx
@@ -124,29 +124,29 @@
   <p:extLst>
     <p:ext uri="{521415D9-36F7-43E2-AB2F-B90AF26B5E84}">
       <p14:sectionLst xmlns:p14="http://schemas.microsoft.com/office/powerpoint/2010/main">
-        <p14:section name="Opening" id="{de4937f8-8685-a6f5-c0a7-31ec5388e918}">
+        <p14:section name="Opening" id="{1e965264-e9a1-0d59-dcff-58fab57feb79}">
           <p14:sldIdLst>
             <p14:sldId id="256"/>
           </p14:sldIdLst>
         </p14:section>
-        <p14:section name="Gate" id="{ad3ab267-2370-30e4-aeae-bad030c2ff6a}">
+        <p14:section name="Gate" id="{237db3d8-4e63-f8e0-daa6-9e906347d852}">
           <p14:sldIdLst>
             <p14:sldId id="257"/>
             <p14:sldId id="258"/>
           </p14:sldIdLst>
         </p14:section>
-        <p14:section name="Pre-teach" id="{0d9dc7a9-f48e-a83b-443a-93ec51e9d126}">
+        <p14:section name="Pre-teach" id="{d5d2daad-377a-1bfe-96b2-2ee38a3bd08a}">
           <p14:sldIdLst>
             <p14:sldId id="259"/>
           </p14:sldIdLst>
         </p14:section>
-        <p14:section name="Read-along" id="{0d349060-2ae6-6276-047c-fbbbc6087eab}">
+        <p14:section name="Read-along" id="{a199f9af-6852-fdaa-22b7-ab44d6474dc2}">
           <p14:sldIdLst>
             <p14:sldId id="260"/>
             <p14:sldId id="261"/>
           </p14:sldIdLst>
         </p14:section>
-        <p14:section name="Teach" id="{9154eb1e-da72-2e00-79d5-bb84bb8d3bd1}">
+        <p14:section name="Teach" id="{eb0090dc-0530-e1e1-de67-53f6a33920a8}">
           <p14:sldIdLst>
             <p14:sldId id="262"/>
             <p14:sldId id="263"/>
@@ -154,7 +154,7 @@
             <p14:sldId id="265"/>
           </p14:sldIdLst>
         </p14:section>
-        <p14:section name="Routes" id="{0907f103-b516-cd9a-fe52-fc998575622b}">
+        <p14:section name="Routes" id="{3e5d072a-a929-c21d-3bd0-c2115a42eef1}">
           <p14:sldIdLst>
             <p14:sldId id="266"/>
             <p14:sldId id="267"/>
@@ -162,12 +162,12 @@
             <p14:sldId id="269"/>
           </p14:sldIdLst>
         </p14:section>
-        <p14:section name="Close" id="{89234001-1f54-47e3-8e9a-0cdac51f3a9c}">
+        <p14:section name="Close" id="{7c9e0834-0aaf-9c4c-f7e4-7295b1ee07b2}">
           <p14:sldIdLst>
             <p14:sldId id="270"/>
           </p14:sldIdLst>
         </p14:section>
-        <p14:section name="Answers" id="{790c69c0-ced8-ed6f-b340-a41548549d7e}">
+        <p14:section name="Answers" id="{1fa4dbfb-b63f-208c-90bd-49ff4bacf2c0}">
           <p14:sldIdLst>
             <p14:sldId id="271"/>
             <p14:sldId id="272"/>
